--- a/public/images/team/Team_Member.pptx
+++ b/public/images/team/Team_Member.pptx
@@ -13,6 +13,8 @@
     <p:sldId id="263" r:id="rId7"/>
     <p:sldId id="264" r:id="rId8"/>
     <p:sldId id="265" r:id="rId9"/>
+    <p:sldId id="266" r:id="rId10"/>
+    <p:sldId id="267" r:id="rId11"/>
   </p:sldIdLst>
   <p:sldSz cx="10107613" cy="7061200"/>
   <p:notesSz cx="6858000" cy="9144000"/>
@@ -111,6 +113,11 @@
       </a:defRPr>
     </a:lvl9pPr>
   </p:defaultTextStyle>
+  <p:extLst>
+    <p:ext uri="{EFAFB233-063F-42B5-8137-9DF3F51BA10A}">
+      <p15:sldGuideLst xmlns:p15="http://schemas.microsoft.com/office/powerpoint/2012/main"/>
+    </p:ext>
+  </p:extLst>
 </p:presentation>
 </file>
 
@@ -3175,6 +3182,171 @@
 </p:sld>
 </file>
 
+<file path=ppt/slides/slide10.xml><?xml version="1.0" encoding="utf-8"?>
+<p:sld xmlns:a="http://schemas.openxmlformats.org/drawingml/2006/main" xmlns:r="http://schemas.openxmlformats.org/officeDocument/2006/relationships" xmlns:p="http://schemas.openxmlformats.org/presentationml/2006/main">
+  <p:cSld>
+    <p:spTree>
+      <p:nvGrpSpPr>
+        <p:cNvPr id="1" name="">
+          <a:extLst>
+            <a:ext uri="{FF2B5EF4-FFF2-40B4-BE49-F238E27FC236}">
+              <a16:creationId xmlns:a16="http://schemas.microsoft.com/office/drawing/2014/main" id="{31122CFD-1F1C-208B-1642-C0A5A5ABE805}"/>
+            </a:ext>
+          </a:extLst>
+        </p:cNvPr>
+        <p:cNvGrpSpPr/>
+        <p:nvPr/>
+      </p:nvGrpSpPr>
+      <p:grpSpPr>
+        <a:xfrm>
+          <a:off x="0" y="0"/>
+          <a:ext cx="0" cy="0"/>
+          <a:chOff x="0" y="0"/>
+          <a:chExt cx="0" cy="0"/>
+        </a:xfrm>
+      </p:grpSpPr>
+      <p:pic>
+        <p:nvPicPr>
+          <p:cNvPr id="2" name="Picture 1">
+            <a:extLst>
+              <a:ext uri="{FF2B5EF4-FFF2-40B4-BE49-F238E27FC236}">
+                <a16:creationId xmlns:a16="http://schemas.microsoft.com/office/drawing/2014/main" id="{75537B93-7E84-5B83-7C8C-F24DA90D9793}"/>
+              </a:ext>
+            </a:extLst>
+          </p:cNvPr>
+          <p:cNvPicPr>
+            <a:picLocks noChangeAspect="1"/>
+          </p:cNvPicPr>
+          <p:nvPr/>
+        </p:nvPicPr>
+        <p:blipFill>
+          <a:blip r:embed="rId2">
+            <a:extLst>
+              <a:ext uri="{28A0092B-C50C-407E-A947-70E740481C1C}">
+                <a14:useLocalDpi xmlns:a14="http://schemas.microsoft.com/office/drawing/2010/main" val="0"/>
+              </a:ext>
+            </a:extLst>
+          </a:blip>
+          <a:srcRect l="35094"/>
+          <a:stretch>
+            <a:fillRect/>
+          </a:stretch>
+        </p:blipFill>
+        <p:spPr>
+          <a:xfrm>
+            <a:off x="5053806" y="0"/>
+            <a:ext cx="4583139" cy="7061200"/>
+          </a:xfrm>
+          <a:prstGeom prst="rect">
+            <a:avLst/>
+          </a:prstGeom>
+        </p:spPr>
+      </p:pic>
+      <p:sp>
+        <p:nvSpPr>
+          <p:cNvPr id="4" name="TextBox 3">
+            <a:extLst>
+              <a:ext uri="{FF2B5EF4-FFF2-40B4-BE49-F238E27FC236}">
+                <a16:creationId xmlns:a16="http://schemas.microsoft.com/office/drawing/2014/main" id="{48B7B87F-1433-F915-68EB-EFA9FC01B7ED}"/>
+              </a:ext>
+            </a:extLst>
+          </p:cNvPr>
+          <p:cNvSpPr txBox="1"/>
+          <p:nvPr/>
+        </p:nvSpPr>
+        <p:spPr>
+          <a:xfrm>
+            <a:off x="573860" y="692305"/>
+            <a:ext cx="4479946" cy="1107996"/>
+          </a:xfrm>
+          <a:prstGeom prst="rect">
+            <a:avLst/>
+          </a:prstGeom>
+          <a:noFill/>
+          <a:ln w="76200">
+            <a:noFill/>
+          </a:ln>
+        </p:spPr>
+        <p:txBody>
+          <a:bodyPr wrap="square" rtlCol="0">
+            <a:spAutoFit/>
+          </a:bodyPr>
+          <a:lstStyle/>
+          <a:p>
+            <a:r>
+              <a:rPr lang="en-US" altLang="zh-TW" sz="6600" b="1" dirty="0">
+                <a:latin typeface="Arial Black" panose="020B0A04020102020204" pitchFamily="34" charset="0"/>
+                <a:ea typeface="微軟正黑體" panose="020B0604030504040204" pitchFamily="34" charset="-120"/>
+              </a:rPr>
+              <a:t>Manager</a:t>
+            </a:r>
+            <a:endParaRPr lang="zh-TW" altLang="en-US" sz="6600" b="1" dirty="0">
+              <a:latin typeface="Arial Black" panose="020B0A04020102020204" pitchFamily="34" charset="0"/>
+              <a:ea typeface="微軟正黑體" panose="020B0604030504040204" pitchFamily="34" charset="-120"/>
+            </a:endParaRPr>
+          </a:p>
+        </p:txBody>
+      </p:sp>
+      <p:sp>
+        <p:nvSpPr>
+          <p:cNvPr id="5" name="TextBox 4">
+            <a:extLst>
+              <a:ext uri="{FF2B5EF4-FFF2-40B4-BE49-F238E27FC236}">
+                <a16:creationId xmlns:a16="http://schemas.microsoft.com/office/drawing/2014/main" id="{16330FD2-4EC1-57A1-B419-ADD4C3B0F314}"/>
+              </a:ext>
+            </a:extLst>
+          </p:cNvPr>
+          <p:cNvSpPr txBox="1"/>
+          <p:nvPr/>
+        </p:nvSpPr>
+        <p:spPr>
+          <a:xfrm>
+            <a:off x="470668" y="3030611"/>
+            <a:ext cx="4974421" cy="1736646"/>
+          </a:xfrm>
+          <a:prstGeom prst="roundRect">
+            <a:avLst/>
+          </a:prstGeom>
+          <a:noFill/>
+          <a:ln w="38100">
+            <a:noFill/>
+          </a:ln>
+        </p:spPr>
+        <p:txBody>
+          <a:bodyPr wrap="square" rtlCol="0">
+            <a:spAutoFit/>
+          </a:bodyPr>
+          <a:lstStyle/>
+          <a:p>
+            <a:r>
+              <a:rPr lang="en-US" altLang="zh-TW" sz="4800" b="1" dirty="0">
+                <a:latin typeface="Arial" panose="020B0604020202020204" pitchFamily="34" charset="0"/>
+                <a:ea typeface="微軟正黑體" panose="020B0604030504040204" pitchFamily="34" charset="-120"/>
+                <a:cs typeface="Arial" panose="020B0604020202020204" pitchFamily="34" charset="0"/>
+              </a:rPr>
+              <a:t>Go easy on the fluoride paste!</a:t>
+            </a:r>
+            <a:endParaRPr lang="zh-TW" altLang="en-US" sz="4800" b="1" dirty="0">
+              <a:latin typeface="Arial" panose="020B0604020202020204" pitchFamily="34" charset="0"/>
+              <a:ea typeface="微軟正黑體" panose="020B0604030504040204" pitchFamily="34" charset="-120"/>
+              <a:cs typeface="Arial" panose="020B0604020202020204" pitchFamily="34" charset="0"/>
+            </a:endParaRPr>
+          </a:p>
+        </p:txBody>
+      </p:sp>
+    </p:spTree>
+    <p:extLst>
+      <p:ext uri="{BB962C8B-B14F-4D97-AF65-F5344CB8AC3E}">
+        <p14:creationId xmlns:p14="http://schemas.microsoft.com/office/powerpoint/2010/main" val="3020017510"/>
+      </p:ext>
+    </p:extLst>
+  </p:cSld>
+  <p:clrMapOvr>
+    <a:masterClrMapping/>
+  </p:clrMapOvr>
+</p:sld>
+</file>
+
 <file path=ppt/slides/slide2.xml><?xml version="1.0" encoding="utf-8"?>
 <p:sld xmlns:a="http://schemas.openxmlformats.org/drawingml/2006/main" xmlns:r="http://schemas.openxmlformats.org/officeDocument/2006/relationships" xmlns:p="http://schemas.openxmlformats.org/presentationml/2006/main">
   <p:cSld>
@@ -4490,6 +4662,175 @@
     <p:extLst>
       <p:ext uri="{BB962C8B-B14F-4D97-AF65-F5344CB8AC3E}">
         <p14:creationId xmlns:p14="http://schemas.microsoft.com/office/powerpoint/2010/main" val="3548382690"/>
+      </p:ext>
+    </p:extLst>
+  </p:cSld>
+  <p:clrMapOvr>
+    <a:masterClrMapping/>
+  </p:clrMapOvr>
+</p:sld>
+</file>
+
+<file path=ppt/slides/slide9.xml><?xml version="1.0" encoding="utf-8"?>
+<p:sld xmlns:a="http://schemas.openxmlformats.org/drawingml/2006/main" xmlns:r="http://schemas.openxmlformats.org/officeDocument/2006/relationships" xmlns:p="http://schemas.openxmlformats.org/presentationml/2006/main">
+  <p:cSld>
+    <p:spTree>
+      <p:nvGrpSpPr>
+        <p:cNvPr id="1" name="">
+          <a:extLst>
+            <a:ext uri="{FF2B5EF4-FFF2-40B4-BE49-F238E27FC236}">
+              <a16:creationId xmlns:a16="http://schemas.microsoft.com/office/drawing/2014/main" id="{094CA3D3-E41A-B3BC-9C43-69DC28FDC27D}"/>
+            </a:ext>
+          </a:extLst>
+        </p:cNvPr>
+        <p:cNvGrpSpPr/>
+        <p:nvPr/>
+      </p:nvGrpSpPr>
+      <p:grpSpPr>
+        <a:xfrm>
+          <a:off x="0" y="0"/>
+          <a:ext cx="0" cy="0"/>
+          <a:chOff x="0" y="0"/>
+          <a:chExt cx="0" cy="0"/>
+        </a:xfrm>
+      </p:grpSpPr>
+      <p:sp>
+        <p:nvSpPr>
+          <p:cNvPr id="4" name="TextBox 3">
+            <a:extLst>
+              <a:ext uri="{FF2B5EF4-FFF2-40B4-BE49-F238E27FC236}">
+                <a16:creationId xmlns:a16="http://schemas.microsoft.com/office/drawing/2014/main" id="{133B75B3-C338-3D72-AB79-CD637C40ACCE}"/>
+              </a:ext>
+            </a:extLst>
+          </p:cNvPr>
+          <p:cNvSpPr txBox="1"/>
+          <p:nvPr/>
+        </p:nvSpPr>
+        <p:spPr>
+          <a:xfrm>
+            <a:off x="1521955" y="786600"/>
+            <a:ext cx="3166647" cy="1107996"/>
+          </a:xfrm>
+          <a:prstGeom prst="rect">
+            <a:avLst/>
+          </a:prstGeom>
+          <a:noFill/>
+          <a:ln w="76200">
+            <a:noFill/>
+          </a:ln>
+        </p:spPr>
+        <p:txBody>
+          <a:bodyPr wrap="square" rtlCol="0">
+            <a:spAutoFit/>
+          </a:bodyPr>
+          <a:lstStyle/>
+          <a:p>
+            <a:r>
+              <a:rPr lang="zh-TW" altLang="en-US" sz="6600" b="1" dirty="0">
+                <a:latin typeface="Arial Black" panose="020B0A04020102020204" pitchFamily="34" charset="0"/>
+                <a:ea typeface="微軟正黑體" panose="020B0604030504040204" pitchFamily="34" charset="-120"/>
+              </a:rPr>
+              <a:t>管理層</a:t>
+            </a:r>
+          </a:p>
+        </p:txBody>
+      </p:sp>
+      <p:sp>
+        <p:nvSpPr>
+          <p:cNvPr id="5" name="TextBox 4">
+            <a:extLst>
+              <a:ext uri="{FF2B5EF4-FFF2-40B4-BE49-F238E27FC236}">
+                <a16:creationId xmlns:a16="http://schemas.microsoft.com/office/drawing/2014/main" id="{30915514-BF77-4F64-12EF-447A31E7C82F}"/>
+              </a:ext>
+            </a:extLst>
+          </p:cNvPr>
+          <p:cNvSpPr txBox="1"/>
+          <p:nvPr/>
+        </p:nvSpPr>
+        <p:spPr>
+          <a:xfrm>
+            <a:off x="767114" y="3759429"/>
+            <a:ext cx="4286692" cy="919401"/>
+          </a:xfrm>
+          <a:prstGeom prst="roundRect">
+            <a:avLst/>
+          </a:prstGeom>
+          <a:noFill/>
+          <a:ln w="38100">
+            <a:noFill/>
+          </a:ln>
+        </p:spPr>
+        <p:txBody>
+          <a:bodyPr wrap="square" rtlCol="0">
+            <a:spAutoFit/>
+          </a:bodyPr>
+          <a:lstStyle/>
+          <a:p>
+            <a:r>
+              <a:rPr lang="zh-TW" altLang="en-US" sz="4800" b="1" dirty="0">
+                <a:latin typeface="Arial" panose="020B0604020202020204" pitchFamily="34" charset="0"/>
+                <a:ea typeface="微軟正黑體" panose="020B0604030504040204" pitchFamily="34" charset="-120"/>
+                <a:cs typeface="Arial" panose="020B0604020202020204" pitchFamily="34" charset="0"/>
+              </a:rPr>
+              <a:t>氟膠省著點用</a:t>
+            </a:r>
+            <a:r>
+              <a:rPr lang="en-US" altLang="zh-TW" sz="4800" b="1" dirty="0">
+                <a:latin typeface="Arial" panose="020B0604020202020204" pitchFamily="34" charset="0"/>
+                <a:ea typeface="微軟正黑體" panose="020B0604030504040204" pitchFamily="34" charset="-120"/>
+                <a:cs typeface="Arial" panose="020B0604020202020204" pitchFamily="34" charset="0"/>
+              </a:rPr>
+              <a:t>!</a:t>
+            </a:r>
+            <a:endParaRPr lang="zh-TW" altLang="en-US" sz="4800" b="1" dirty="0">
+              <a:latin typeface="Arial" panose="020B0604020202020204" pitchFamily="34" charset="0"/>
+              <a:ea typeface="微軟正黑體" panose="020B0604030504040204" pitchFamily="34" charset="-120"/>
+              <a:cs typeface="Arial" panose="020B0604020202020204" pitchFamily="34" charset="0"/>
+            </a:endParaRPr>
+          </a:p>
+        </p:txBody>
+      </p:sp>
+      <p:pic>
+        <p:nvPicPr>
+          <p:cNvPr id="7" name="Picture 6">
+            <a:extLst>
+              <a:ext uri="{FF2B5EF4-FFF2-40B4-BE49-F238E27FC236}">
+                <a16:creationId xmlns:a16="http://schemas.microsoft.com/office/drawing/2014/main" id="{7F5C79B9-9F0F-4A00-6E6A-A998AE9993A6}"/>
+              </a:ext>
+            </a:extLst>
+          </p:cNvPr>
+          <p:cNvPicPr>
+            <a:picLocks noChangeAspect="1"/>
+          </p:cNvPicPr>
+          <p:nvPr/>
+        </p:nvPicPr>
+        <p:blipFill>
+          <a:blip r:embed="rId2">
+            <a:extLst>
+              <a:ext uri="{28A0092B-C50C-407E-A947-70E740481C1C}">
+                <a14:useLocalDpi xmlns:a14="http://schemas.microsoft.com/office/drawing/2010/main" val="0"/>
+              </a:ext>
+            </a:extLst>
+          </a:blip>
+          <a:srcRect l="35094"/>
+          <a:stretch>
+            <a:fillRect/>
+          </a:stretch>
+        </p:blipFill>
+        <p:spPr>
+          <a:xfrm>
+            <a:off x="5053806" y="0"/>
+            <a:ext cx="4583139" cy="7061200"/>
+          </a:xfrm>
+          <a:prstGeom prst="rect">
+            <a:avLst/>
+          </a:prstGeom>
+        </p:spPr>
+      </p:pic>
+    </p:spTree>
+    <p:extLst>
+      <p:ext uri="{BB962C8B-B14F-4D97-AF65-F5344CB8AC3E}">
+        <p14:creationId xmlns:p14="http://schemas.microsoft.com/office/powerpoint/2010/main" val="590311958"/>
       </p:ext>
     </p:extLst>
   </p:cSld>

--- a/public/images/team/Team_Member.pptx
+++ b/public/images/team/Team_Member.pptx
@@ -15,6 +15,7 @@
     <p:sldId id="265" r:id="rId9"/>
     <p:sldId id="266" r:id="rId10"/>
     <p:sldId id="267" r:id="rId11"/>
+    <p:sldId id="268" r:id="rId12"/>
   </p:sldIdLst>
   <p:sldSz cx="10107613" cy="7061200"/>
   <p:notesSz cx="6858000" cy="9144000"/>
@@ -3347,6 +3348,230 @@
 </p:sld>
 </file>
 
+<file path=ppt/slides/slide11.xml><?xml version="1.0" encoding="utf-8"?>
+<p:sld xmlns:a="http://schemas.openxmlformats.org/drawingml/2006/main" xmlns:r="http://schemas.openxmlformats.org/officeDocument/2006/relationships" xmlns:p="http://schemas.openxmlformats.org/presentationml/2006/main">
+  <p:cSld>
+    <p:spTree>
+      <p:nvGrpSpPr>
+        <p:cNvPr id="1" name=""/>
+        <p:cNvGrpSpPr/>
+        <p:nvPr/>
+      </p:nvGrpSpPr>
+      <p:grpSpPr>
+        <a:xfrm>
+          <a:off x="0" y="0"/>
+          <a:ext cx="0" cy="0"/>
+          <a:chOff x="0" y="0"/>
+          <a:chExt cx="0" cy="0"/>
+        </a:xfrm>
+      </p:grpSpPr>
+      <p:pic>
+        <p:nvPicPr>
+          <p:cNvPr id="3" name="Picture 2">
+            <a:extLst>
+              <a:ext uri="{FF2B5EF4-FFF2-40B4-BE49-F238E27FC236}">
+                <a16:creationId xmlns:a16="http://schemas.microsoft.com/office/drawing/2014/main" id="{643E4C06-2956-4CE6-7ED1-76B82813FA3B}"/>
+              </a:ext>
+            </a:extLst>
+          </p:cNvPr>
+          <p:cNvPicPr>
+            <a:picLocks noChangeAspect="1"/>
+          </p:cNvPicPr>
+          <p:nvPr/>
+        </p:nvPicPr>
+        <p:blipFill>
+          <a:blip r:embed="rId2"/>
+          <a:stretch>
+            <a:fillRect/>
+          </a:stretch>
+        </p:blipFill>
+        <p:spPr>
+          <a:xfrm>
+            <a:off x="-1" y="281152"/>
+            <a:ext cx="10107613" cy="3909118"/>
+          </a:xfrm>
+          <a:prstGeom prst="rect">
+            <a:avLst/>
+          </a:prstGeom>
+        </p:spPr>
+      </p:pic>
+      <p:sp>
+        <p:nvSpPr>
+          <p:cNvPr id="4" name="TextBox 3">
+            <a:extLst>
+              <a:ext uri="{FF2B5EF4-FFF2-40B4-BE49-F238E27FC236}">
+                <a16:creationId xmlns:a16="http://schemas.microsoft.com/office/drawing/2014/main" id="{B3EA7CBC-423F-163D-3FDC-98D1D989066E}"/>
+              </a:ext>
+            </a:extLst>
+          </p:cNvPr>
+          <p:cNvSpPr txBox="1"/>
+          <p:nvPr/>
+        </p:nvSpPr>
+        <p:spPr>
+          <a:xfrm>
+            <a:off x="276164" y="3530598"/>
+            <a:ext cx="1804250" cy="408623"/>
+          </a:xfrm>
+          <a:prstGeom prst="roundRect">
+            <a:avLst/>
+          </a:prstGeom>
+          <a:noFill/>
+          <a:ln w="28575">
+            <a:solidFill>
+              <a:schemeClr val="tx2">
+                <a:lumMod val="50000"/>
+                <a:lumOff val="50000"/>
+              </a:schemeClr>
+            </a:solidFill>
+          </a:ln>
+          <a:effectLst>
+            <a:outerShdw blurRad="50800" dist="38100" dir="2700000" algn="tl" rotWithShape="0">
+              <a:prstClr val="black">
+                <a:alpha val="40000"/>
+              </a:prstClr>
+            </a:outerShdw>
+          </a:effectLst>
+        </p:spPr>
+        <p:txBody>
+          <a:bodyPr wrap="square" rtlCol="0">
+            <a:spAutoFit/>
+          </a:bodyPr>
+          <a:lstStyle/>
+          <a:p>
+            <a:r>
+              <a:rPr lang="zh-TW" altLang="en-US" b="1" dirty="0">
+                <a:solidFill>
+                  <a:schemeClr val="tx2">
+                    <a:lumMod val="75000"/>
+                    <a:lumOff val="25000"/>
+                  </a:schemeClr>
+                </a:solidFill>
+                <a:latin typeface="Arial Black" panose="020B0A04020102020204" pitchFamily="34" charset="0"/>
+                <a:ea typeface="微軟正黑體" panose="020B0604030504040204" pitchFamily="34" charset="-120"/>
+              </a:rPr>
+              <a:t>牙周病科地圖</a:t>
+            </a:r>
+            <a:r>
+              <a:rPr lang="en-US" altLang="zh-TW" b="1" dirty="0">
+                <a:solidFill>
+                  <a:schemeClr val="tx2">
+                    <a:lumMod val="75000"/>
+                    <a:lumOff val="25000"/>
+                  </a:schemeClr>
+                </a:solidFill>
+                <a:latin typeface="Arial Black" panose="020B0A04020102020204" pitchFamily="34" charset="0"/>
+                <a:ea typeface="微軟正黑體" panose="020B0604030504040204" pitchFamily="34" charset="-120"/>
+              </a:rPr>
+              <a:t>1</a:t>
+            </a:r>
+            <a:endParaRPr lang="zh-TW" altLang="en-US" b="1" dirty="0">
+              <a:solidFill>
+                <a:schemeClr val="tx2">
+                  <a:lumMod val="75000"/>
+                  <a:lumOff val="25000"/>
+                </a:schemeClr>
+              </a:solidFill>
+              <a:latin typeface="Arial Black" panose="020B0A04020102020204" pitchFamily="34" charset="0"/>
+              <a:ea typeface="微軟正黑體" panose="020B0604030504040204" pitchFamily="34" charset="-120"/>
+            </a:endParaRPr>
+          </a:p>
+        </p:txBody>
+      </p:sp>
+      <p:sp>
+        <p:nvSpPr>
+          <p:cNvPr id="5" name="TextBox 4">
+            <a:extLst>
+              <a:ext uri="{FF2B5EF4-FFF2-40B4-BE49-F238E27FC236}">
+                <a16:creationId xmlns:a16="http://schemas.microsoft.com/office/drawing/2014/main" id="{69130A9F-69D8-7284-C889-1FADC28595BF}"/>
+              </a:ext>
+            </a:extLst>
+          </p:cNvPr>
+          <p:cNvSpPr txBox="1"/>
+          <p:nvPr/>
+        </p:nvSpPr>
+        <p:spPr>
+          <a:xfrm>
+            <a:off x="2356579" y="3530597"/>
+            <a:ext cx="1804250" cy="408623"/>
+          </a:xfrm>
+          <a:prstGeom prst="roundRect">
+            <a:avLst/>
+          </a:prstGeom>
+          <a:noFill/>
+          <a:ln w="28575">
+            <a:solidFill>
+              <a:schemeClr val="tx2">
+                <a:lumMod val="50000"/>
+                <a:lumOff val="50000"/>
+              </a:schemeClr>
+            </a:solidFill>
+          </a:ln>
+          <a:effectLst>
+            <a:outerShdw blurRad="50800" dist="38100" dir="2700000" algn="tl" rotWithShape="0">
+              <a:prstClr val="black">
+                <a:alpha val="40000"/>
+              </a:prstClr>
+            </a:outerShdw>
+          </a:effectLst>
+        </p:spPr>
+        <p:txBody>
+          <a:bodyPr wrap="square" rtlCol="0">
+            <a:spAutoFit/>
+          </a:bodyPr>
+          <a:lstStyle/>
+          <a:p>
+            <a:r>
+              <a:rPr lang="zh-TW" altLang="en-US" b="1" dirty="0">
+                <a:solidFill>
+                  <a:schemeClr val="tx2">
+                    <a:lumMod val="75000"/>
+                    <a:lumOff val="25000"/>
+                  </a:schemeClr>
+                </a:solidFill>
+                <a:latin typeface="Arial Black" panose="020B0A04020102020204" pitchFamily="34" charset="0"/>
+                <a:ea typeface="微軟正黑體" panose="020B0604030504040204" pitchFamily="34" charset="-120"/>
+              </a:rPr>
+              <a:t>牙周病科地圖</a:t>
+            </a:r>
+            <a:r>
+              <a:rPr lang="en-US" altLang="zh-TW" b="1" dirty="0">
+                <a:solidFill>
+                  <a:schemeClr val="tx2">
+                    <a:lumMod val="75000"/>
+                    <a:lumOff val="25000"/>
+                  </a:schemeClr>
+                </a:solidFill>
+                <a:latin typeface="Arial Black" panose="020B0A04020102020204" pitchFamily="34" charset="0"/>
+                <a:ea typeface="微軟正黑體" panose="020B0604030504040204" pitchFamily="34" charset="-120"/>
+              </a:rPr>
+              <a:t>2</a:t>
+            </a:r>
+            <a:endParaRPr lang="zh-TW" altLang="en-US" b="1" dirty="0">
+              <a:solidFill>
+                <a:schemeClr val="tx2">
+                  <a:lumMod val="75000"/>
+                  <a:lumOff val="25000"/>
+                </a:schemeClr>
+              </a:solidFill>
+              <a:latin typeface="Arial Black" panose="020B0A04020102020204" pitchFamily="34" charset="0"/>
+              <a:ea typeface="微軟正黑體" panose="020B0604030504040204" pitchFamily="34" charset="-120"/>
+            </a:endParaRPr>
+          </a:p>
+        </p:txBody>
+      </p:sp>
+    </p:spTree>
+    <p:extLst>
+      <p:ext uri="{BB962C8B-B14F-4D97-AF65-F5344CB8AC3E}">
+        <p14:creationId xmlns:p14="http://schemas.microsoft.com/office/powerpoint/2010/main" val="1354662601"/>
+      </p:ext>
+    </p:extLst>
+  </p:cSld>
+  <p:clrMapOvr>
+    <a:masterClrMapping/>
+  </p:clrMapOvr>
+</p:sld>
+</file>
+
 <file path=ppt/slides/slide2.xml><?xml version="1.0" encoding="utf-8"?>
 <p:sld xmlns:a="http://schemas.openxmlformats.org/drawingml/2006/main" xmlns:r="http://schemas.openxmlformats.org/officeDocument/2006/relationships" xmlns:p="http://schemas.openxmlformats.org/presentationml/2006/main">
   <p:cSld>

--- a/public/images/team/Team_Member.pptx
+++ b/public/images/team/Team_Member.pptx
@@ -16,6 +16,8 @@
     <p:sldId id="266" r:id="rId10"/>
     <p:sldId id="267" r:id="rId11"/>
     <p:sldId id="268" r:id="rId12"/>
+    <p:sldId id="269" r:id="rId13"/>
+    <p:sldId id="270" r:id="rId14"/>
   </p:sldIdLst>
   <p:sldSz cx="10107613" cy="7061200"/>
   <p:notesSz cx="6858000" cy="9144000"/>
@@ -3572,6 +3574,482 @@
 </p:sld>
 </file>
 
+<file path=ppt/slides/slide12.xml><?xml version="1.0" encoding="utf-8"?>
+<p:sld xmlns:a="http://schemas.openxmlformats.org/drawingml/2006/main" xmlns:r="http://schemas.openxmlformats.org/officeDocument/2006/relationships" xmlns:p="http://schemas.openxmlformats.org/presentationml/2006/main">
+  <p:cSld>
+    <p:spTree>
+      <p:nvGrpSpPr>
+        <p:cNvPr id="1" name=""/>
+        <p:cNvGrpSpPr/>
+        <p:nvPr/>
+      </p:nvGrpSpPr>
+      <p:grpSpPr>
+        <a:xfrm>
+          <a:off x="0" y="0"/>
+          <a:ext cx="0" cy="0"/>
+          <a:chOff x="0" y="0"/>
+          <a:chExt cx="0" cy="0"/>
+        </a:xfrm>
+      </p:grpSpPr>
+      <p:pic>
+        <p:nvPicPr>
+          <p:cNvPr id="3" name="Picture 2">
+            <a:extLst>
+              <a:ext uri="{FF2B5EF4-FFF2-40B4-BE49-F238E27FC236}">
+                <a16:creationId xmlns:a16="http://schemas.microsoft.com/office/drawing/2014/main" id="{C1E7A62C-92FA-C15E-0341-997E1BA4CE6B}"/>
+              </a:ext>
+            </a:extLst>
+          </p:cNvPr>
+          <p:cNvPicPr>
+            <a:picLocks noChangeAspect="1"/>
+          </p:cNvPicPr>
+          <p:nvPr/>
+        </p:nvPicPr>
+        <p:blipFill>
+          <a:blip r:embed="rId2">
+            <a:extLst>
+              <a:ext uri="{28A0092B-C50C-407E-A947-70E740481C1C}">
+                <a14:useLocalDpi xmlns:a14="http://schemas.microsoft.com/office/drawing/2010/main" val="0"/>
+              </a:ext>
+            </a:extLst>
+          </a:blip>
+          <a:srcRect l="15951" t="20273" r="20184"/>
+          <a:stretch>
+            <a:fillRect/>
+          </a:stretch>
+        </p:blipFill>
+        <p:spPr>
+          <a:xfrm>
+            <a:off x="4805203" y="564596"/>
+            <a:ext cx="5204102" cy="6496604"/>
+          </a:xfrm>
+          <a:prstGeom prst="rect">
+            <a:avLst/>
+          </a:prstGeom>
+        </p:spPr>
+      </p:pic>
+      <p:sp>
+        <p:nvSpPr>
+          <p:cNvPr id="4" name="TextBox 3">
+            <a:extLst>
+              <a:ext uri="{FF2B5EF4-FFF2-40B4-BE49-F238E27FC236}">
+                <a16:creationId xmlns:a16="http://schemas.microsoft.com/office/drawing/2014/main" id="{B6E7952D-11BB-EDD5-B4E3-84D97D1D7987}"/>
+              </a:ext>
+            </a:extLst>
+          </p:cNvPr>
+          <p:cNvSpPr txBox="1"/>
+          <p:nvPr/>
+        </p:nvSpPr>
+        <p:spPr>
+          <a:xfrm>
+            <a:off x="767114" y="823061"/>
+            <a:ext cx="3166647" cy="1107996"/>
+          </a:xfrm>
+          <a:prstGeom prst="rect">
+            <a:avLst/>
+          </a:prstGeom>
+          <a:noFill/>
+          <a:ln w="76200">
+            <a:noFill/>
+          </a:ln>
+        </p:spPr>
+        <p:txBody>
+          <a:bodyPr wrap="square" rtlCol="0">
+            <a:spAutoFit/>
+          </a:bodyPr>
+          <a:lstStyle/>
+          <a:p>
+            <a:r>
+              <a:rPr lang="zh-TW" altLang="en-US" sz="6600" b="1" dirty="0">
+                <a:latin typeface="Arial Black" panose="020B0A04020102020204" pitchFamily="34" charset="0"/>
+                <a:ea typeface="微軟正黑體" panose="020B0604030504040204" pitchFamily="34" charset="-120"/>
+              </a:rPr>
+              <a:t>蕭博士</a:t>
+            </a:r>
+          </a:p>
+        </p:txBody>
+      </p:sp>
+      <p:sp>
+        <p:nvSpPr>
+          <p:cNvPr id="5" name="TextBox 4">
+            <a:extLst>
+              <a:ext uri="{FF2B5EF4-FFF2-40B4-BE49-F238E27FC236}">
+                <a16:creationId xmlns:a16="http://schemas.microsoft.com/office/drawing/2014/main" id="{8CA489CA-9F0A-CA55-43AF-C0B349887CAD}"/>
+              </a:ext>
+            </a:extLst>
+          </p:cNvPr>
+          <p:cNvSpPr txBox="1"/>
+          <p:nvPr/>
+        </p:nvSpPr>
+        <p:spPr>
+          <a:xfrm>
+            <a:off x="619828" y="2452487"/>
+            <a:ext cx="4286692" cy="3785652"/>
+          </a:xfrm>
+          <a:prstGeom prst="rect">
+            <a:avLst/>
+          </a:prstGeom>
+          <a:noFill/>
+          <a:ln w="38100">
+            <a:noFill/>
+          </a:ln>
+        </p:spPr>
+        <p:txBody>
+          <a:bodyPr wrap="square" rtlCol="0">
+            <a:spAutoFit/>
+          </a:bodyPr>
+          <a:lstStyle/>
+          <a:p>
+            <a:r>
+              <a:rPr lang="zh-TW" altLang="en-US" sz="4800" b="1" dirty="0">
+                <a:latin typeface="Arial" panose="020B0604020202020204" pitchFamily="34" charset="0"/>
+                <a:ea typeface="微軟正黑體" panose="020B0604030504040204" pitchFamily="34" charset="-120"/>
+                <a:cs typeface="Arial" panose="020B0604020202020204" pitchFamily="34" charset="0"/>
+              </a:rPr>
+              <a:t>這種腫瘤的</a:t>
+            </a:r>
+            <a:br>
+              <a:rPr lang="en-US" altLang="zh-TW" sz="4800" b="1" dirty="0">
+                <a:latin typeface="Arial" panose="020B0604020202020204" pitchFamily="34" charset="0"/>
+                <a:ea typeface="微軟正黑體" panose="020B0604030504040204" pitchFamily="34" charset="-120"/>
+                <a:cs typeface="Arial" panose="020B0604020202020204" pitchFamily="34" charset="0"/>
+              </a:rPr>
+            </a:br>
+            <a:r>
+              <a:rPr lang="zh-TW" altLang="en-US" sz="4800" b="1" dirty="0">
+                <a:latin typeface="Arial" panose="020B0604020202020204" pitchFamily="34" charset="0"/>
+                <a:ea typeface="微軟正黑體" panose="020B0604030504040204" pitchFamily="34" charset="-120"/>
+                <a:cs typeface="Arial" panose="020B0604020202020204" pitchFamily="34" charset="0"/>
+              </a:rPr>
+              <a:t>病理機轉</a:t>
+            </a:r>
+            <a:br>
+              <a:rPr lang="en-US" altLang="zh-TW" sz="4800" b="1" dirty="0">
+                <a:latin typeface="Arial" panose="020B0604020202020204" pitchFamily="34" charset="0"/>
+                <a:ea typeface="微軟正黑體" panose="020B0604030504040204" pitchFamily="34" charset="-120"/>
+                <a:cs typeface="Arial" panose="020B0604020202020204" pitchFamily="34" charset="0"/>
+              </a:rPr>
+            </a:br>
+            <a:r>
+              <a:rPr lang="zh-TW" altLang="en-US" sz="4800" b="1" dirty="0">
+                <a:latin typeface="Arial" panose="020B0604020202020204" pitchFamily="34" charset="0"/>
+                <a:ea typeface="微軟正黑體" panose="020B0604030504040204" pitchFamily="34" charset="-120"/>
+                <a:cs typeface="Arial" panose="020B0604020202020204" pitchFamily="34" charset="0"/>
+              </a:rPr>
+              <a:t>可以看我在</a:t>
+            </a:r>
+            <a:r>
+              <a:rPr lang="en-US" altLang="zh-TW" sz="4800" b="1" dirty="0">
+                <a:latin typeface="Arial" panose="020B0604020202020204" pitchFamily="34" charset="0"/>
+                <a:ea typeface="微軟正黑體" panose="020B0604030504040204" pitchFamily="34" charset="-120"/>
+                <a:cs typeface="Arial" panose="020B0604020202020204" pitchFamily="34" charset="0"/>
+              </a:rPr>
+              <a:t>2018</a:t>
+            </a:r>
+            <a:r>
+              <a:rPr lang="zh-TW" altLang="en-US" sz="4800" b="1" dirty="0">
+                <a:latin typeface="Arial" panose="020B0604020202020204" pitchFamily="34" charset="0"/>
+                <a:ea typeface="微軟正黑體" panose="020B0604030504040204" pitchFamily="34" charset="-120"/>
+                <a:cs typeface="Arial" panose="020B0604020202020204" pitchFamily="34" charset="0"/>
+              </a:rPr>
+              <a:t>年發表的第</a:t>
+            </a:r>
+            <a:r>
+              <a:rPr lang="en-US" altLang="zh-TW" sz="4800" b="1" dirty="0">
+                <a:latin typeface="Arial" panose="020B0604020202020204" pitchFamily="34" charset="0"/>
+                <a:ea typeface="微軟正黑體" panose="020B0604030504040204" pitchFamily="34" charset="-120"/>
+                <a:cs typeface="Arial" panose="020B0604020202020204" pitchFamily="34" charset="0"/>
+              </a:rPr>
+              <a:t>24</a:t>
+            </a:r>
+            <a:r>
+              <a:rPr lang="zh-TW" altLang="en-US" sz="4800" b="1" dirty="0">
+                <a:latin typeface="Arial" panose="020B0604020202020204" pitchFamily="34" charset="0"/>
+                <a:ea typeface="微軟正黑體" panose="020B0604030504040204" pitchFamily="34" charset="-120"/>
+                <a:cs typeface="Arial" panose="020B0604020202020204" pitchFamily="34" charset="0"/>
+              </a:rPr>
+              <a:t>篇論文</a:t>
+            </a:r>
+            <a:r>
+              <a:rPr lang="en-US" altLang="zh-TW" sz="4800" b="1" dirty="0">
+                <a:latin typeface="Arial" panose="020B0604020202020204" pitchFamily="34" charset="0"/>
+                <a:ea typeface="微軟正黑體" panose="020B0604030504040204" pitchFamily="34" charset="-120"/>
+                <a:cs typeface="Arial" panose="020B0604020202020204" pitchFamily="34" charset="0"/>
+              </a:rPr>
+              <a:t>…</a:t>
+            </a:r>
+            <a:endParaRPr lang="zh-TW" altLang="en-US" sz="4800" b="1" dirty="0">
+              <a:latin typeface="Arial" panose="020B0604020202020204" pitchFamily="34" charset="0"/>
+              <a:ea typeface="微軟正黑體" panose="020B0604030504040204" pitchFamily="34" charset="-120"/>
+              <a:cs typeface="Arial" panose="020B0604020202020204" pitchFamily="34" charset="0"/>
+            </a:endParaRPr>
+          </a:p>
+        </p:txBody>
+      </p:sp>
+    </p:spTree>
+    <p:extLst>
+      <p:ext uri="{BB962C8B-B14F-4D97-AF65-F5344CB8AC3E}">
+        <p14:creationId xmlns:p14="http://schemas.microsoft.com/office/powerpoint/2010/main" val="2691537656"/>
+      </p:ext>
+    </p:extLst>
+  </p:cSld>
+  <p:clrMapOvr>
+    <a:masterClrMapping/>
+  </p:clrMapOvr>
+</p:sld>
+</file>
+
+<file path=ppt/slides/slide13.xml><?xml version="1.0" encoding="utf-8"?>
+<p:sld xmlns:a="http://schemas.openxmlformats.org/drawingml/2006/main" xmlns:r="http://schemas.openxmlformats.org/officeDocument/2006/relationships" xmlns:p="http://schemas.openxmlformats.org/presentationml/2006/main">
+  <p:cSld>
+    <p:spTree>
+      <p:nvGrpSpPr>
+        <p:cNvPr id="1" name="">
+          <a:extLst>
+            <a:ext uri="{FF2B5EF4-FFF2-40B4-BE49-F238E27FC236}">
+              <a16:creationId xmlns:a16="http://schemas.microsoft.com/office/drawing/2014/main" id="{DD0B2F82-AB0D-3823-6B1E-9201D8DB2D27}"/>
+            </a:ext>
+          </a:extLst>
+        </p:cNvPr>
+        <p:cNvGrpSpPr/>
+        <p:nvPr/>
+      </p:nvGrpSpPr>
+      <p:grpSpPr>
+        <a:xfrm>
+          <a:off x="0" y="0"/>
+          <a:ext cx="0" cy="0"/>
+          <a:chOff x="0" y="0"/>
+          <a:chExt cx="0" cy="0"/>
+        </a:xfrm>
+      </p:grpSpPr>
+      <p:pic>
+        <p:nvPicPr>
+          <p:cNvPr id="3" name="Picture 2">
+            <a:extLst>
+              <a:ext uri="{FF2B5EF4-FFF2-40B4-BE49-F238E27FC236}">
+                <a16:creationId xmlns:a16="http://schemas.microsoft.com/office/drawing/2014/main" id="{D4DC8BEA-1449-A530-9373-C7C6866A0CC2}"/>
+              </a:ext>
+            </a:extLst>
+          </p:cNvPr>
+          <p:cNvPicPr>
+            <a:picLocks noChangeAspect="1"/>
+          </p:cNvPicPr>
+          <p:nvPr/>
+        </p:nvPicPr>
+        <p:blipFill>
+          <a:blip r:embed="rId2">
+            <a:extLst>
+              <a:ext uri="{28A0092B-C50C-407E-A947-70E740481C1C}">
+                <a14:useLocalDpi xmlns:a14="http://schemas.microsoft.com/office/drawing/2010/main" val="0"/>
+              </a:ext>
+            </a:extLst>
+          </a:blip>
+          <a:srcRect l="15951" t="20273" r="20184"/>
+          <a:stretch>
+            <a:fillRect/>
+          </a:stretch>
+        </p:blipFill>
+        <p:spPr>
+          <a:xfrm>
+            <a:off x="4805203" y="564596"/>
+            <a:ext cx="5204102" cy="6496604"/>
+          </a:xfrm>
+          <a:prstGeom prst="rect">
+            <a:avLst/>
+          </a:prstGeom>
+        </p:spPr>
+      </p:pic>
+      <p:sp>
+        <p:nvSpPr>
+          <p:cNvPr id="2" name="TextBox 1">
+            <a:extLst>
+              <a:ext uri="{FF2B5EF4-FFF2-40B4-BE49-F238E27FC236}">
+                <a16:creationId xmlns:a16="http://schemas.microsoft.com/office/drawing/2014/main" id="{EDC9CFEE-0D68-D24A-DB23-FE17C4657E14}"/>
+              </a:ext>
+            </a:extLst>
+          </p:cNvPr>
+          <p:cNvSpPr txBox="1"/>
+          <p:nvPr/>
+        </p:nvSpPr>
+        <p:spPr>
+          <a:xfrm>
+            <a:off x="573860" y="692305"/>
+            <a:ext cx="4479946" cy="1107996"/>
+          </a:xfrm>
+          <a:prstGeom prst="rect">
+            <a:avLst/>
+          </a:prstGeom>
+          <a:noFill/>
+          <a:ln w="76200">
+            <a:noFill/>
+          </a:ln>
+        </p:spPr>
+        <p:txBody>
+          <a:bodyPr wrap="square" rtlCol="0">
+            <a:spAutoFit/>
+          </a:bodyPr>
+          <a:lstStyle/>
+          <a:p>
+            <a:r>
+              <a:rPr lang="en-US" altLang="zh-TW" sz="6600" b="1" dirty="0">
+                <a:latin typeface="Arial Black" panose="020B0A04020102020204" pitchFamily="34" charset="0"/>
+                <a:ea typeface="微軟正黑體" panose="020B0604030504040204" pitchFamily="34" charset="-120"/>
+              </a:rPr>
+              <a:t>Dr. Shaw</a:t>
+            </a:r>
+            <a:endParaRPr lang="zh-TW" altLang="en-US" sz="6600" b="1" dirty="0">
+              <a:latin typeface="Arial Black" panose="020B0A04020102020204" pitchFamily="34" charset="0"/>
+              <a:ea typeface="微軟正黑體" panose="020B0604030504040204" pitchFamily="34" charset="-120"/>
+            </a:endParaRPr>
+          </a:p>
+        </p:txBody>
+      </p:sp>
+      <p:sp>
+        <p:nvSpPr>
+          <p:cNvPr id="4" name="TextBox 3">
+            <a:extLst>
+              <a:ext uri="{FF2B5EF4-FFF2-40B4-BE49-F238E27FC236}">
+                <a16:creationId xmlns:a16="http://schemas.microsoft.com/office/drawing/2014/main" id="{C9FD62BC-B149-E0BD-6051-C5D298942AF7}"/>
+              </a:ext>
+            </a:extLst>
+          </p:cNvPr>
+          <p:cNvSpPr txBox="1"/>
+          <p:nvPr/>
+        </p:nvSpPr>
+        <p:spPr>
+          <a:xfrm>
+            <a:off x="317674" y="1732795"/>
+            <a:ext cx="5082810" cy="5262979"/>
+          </a:xfrm>
+          <a:prstGeom prst="rect">
+            <a:avLst/>
+          </a:prstGeom>
+          <a:noFill/>
+          <a:ln w="38100">
+            <a:noFill/>
+          </a:ln>
+        </p:spPr>
+        <p:txBody>
+          <a:bodyPr wrap="square" rtlCol="0">
+            <a:spAutoFit/>
+          </a:bodyPr>
+          <a:lstStyle/>
+          <a:p>
+            <a:r>
+              <a:rPr lang="en-US" altLang="zh-TW" sz="4800" b="1" dirty="0">
+                <a:latin typeface="Arial" panose="020B0604020202020204" pitchFamily="34" charset="0"/>
+                <a:ea typeface="微軟正黑體" panose="020B0604030504040204" pitchFamily="34" charset="-120"/>
+                <a:cs typeface="Arial" panose="020B0604020202020204" pitchFamily="34" charset="0"/>
+              </a:rPr>
+              <a:t>You can find </a:t>
+            </a:r>
+            <a:br>
+              <a:rPr lang="en-US" altLang="zh-TW" sz="4800" b="1" dirty="0">
+                <a:latin typeface="Arial" panose="020B0604020202020204" pitchFamily="34" charset="0"/>
+                <a:ea typeface="微軟正黑體" panose="020B0604030504040204" pitchFamily="34" charset="-120"/>
+                <a:cs typeface="Arial" panose="020B0604020202020204" pitchFamily="34" charset="0"/>
+              </a:rPr>
+            </a:br>
+            <a:r>
+              <a:rPr lang="en-US" altLang="zh-TW" sz="4800" b="1" dirty="0">
+                <a:latin typeface="Arial" panose="020B0604020202020204" pitchFamily="34" charset="0"/>
+                <a:ea typeface="微軟正黑體" panose="020B0604030504040204" pitchFamily="34" charset="-120"/>
+                <a:cs typeface="Arial" panose="020B0604020202020204" pitchFamily="34" charset="0"/>
+              </a:rPr>
+              <a:t>the mechanism</a:t>
+            </a:r>
+          </a:p>
+          <a:p>
+            <a:r>
+              <a:rPr lang="en-US" altLang="zh-TW" sz="4800" b="1" dirty="0">
+                <a:latin typeface="Arial" panose="020B0604020202020204" pitchFamily="34" charset="0"/>
+                <a:ea typeface="微軟正黑體" panose="020B0604030504040204" pitchFamily="34" charset="-120"/>
+                <a:cs typeface="Arial" panose="020B0604020202020204" pitchFamily="34" charset="0"/>
+              </a:rPr>
+              <a:t>of this neoplasm</a:t>
+            </a:r>
+            <a:br>
+              <a:rPr lang="en-US" altLang="zh-TW" sz="4800" b="1" dirty="0">
+                <a:latin typeface="Arial" panose="020B0604020202020204" pitchFamily="34" charset="0"/>
+                <a:ea typeface="微軟正黑體" panose="020B0604030504040204" pitchFamily="34" charset="-120"/>
+                <a:cs typeface="Arial" panose="020B0604020202020204" pitchFamily="34" charset="0"/>
+              </a:rPr>
+            </a:br>
+            <a:r>
+              <a:rPr lang="en-US" altLang="zh-TW" sz="4800" b="1" dirty="0">
+                <a:latin typeface="Arial" panose="020B0604020202020204" pitchFamily="34" charset="0"/>
+                <a:ea typeface="微軟正黑體" panose="020B0604030504040204" pitchFamily="34" charset="-120"/>
+                <a:cs typeface="Arial" panose="020B0604020202020204" pitchFamily="34" charset="0"/>
+              </a:rPr>
+              <a:t>in the 24</a:t>
+            </a:r>
+            <a:r>
+              <a:rPr lang="en-US" altLang="zh-TW" sz="4800" b="1" baseline="30000" dirty="0">
+                <a:latin typeface="Arial" panose="020B0604020202020204" pitchFamily="34" charset="0"/>
+                <a:ea typeface="微軟正黑體" panose="020B0604030504040204" pitchFamily="34" charset="-120"/>
+                <a:cs typeface="Arial" panose="020B0604020202020204" pitchFamily="34" charset="0"/>
+              </a:rPr>
+              <a:t>th</a:t>
+            </a:r>
+            <a:r>
+              <a:rPr lang="en-US" altLang="zh-TW" sz="4800" b="1" dirty="0">
+                <a:latin typeface="Arial" panose="020B0604020202020204" pitchFamily="34" charset="0"/>
+                <a:ea typeface="微軟正黑體" panose="020B0604030504040204" pitchFamily="34" charset="-120"/>
+                <a:cs typeface="Arial" panose="020B0604020202020204" pitchFamily="34" charset="0"/>
+              </a:rPr>
+              <a:t> journal paper</a:t>
+            </a:r>
+            <a:br>
+              <a:rPr lang="en-US" altLang="zh-TW" sz="4800" b="1" dirty="0">
+                <a:latin typeface="Arial" panose="020B0604020202020204" pitchFamily="34" charset="0"/>
+                <a:ea typeface="微軟正黑體" panose="020B0604030504040204" pitchFamily="34" charset="-120"/>
+                <a:cs typeface="Arial" panose="020B0604020202020204" pitchFamily="34" charset="0"/>
+              </a:rPr>
+            </a:br>
+            <a:r>
+              <a:rPr lang="en-US" altLang="zh-TW" sz="4800" b="1" dirty="0">
+                <a:latin typeface="Arial" panose="020B0604020202020204" pitchFamily="34" charset="0"/>
+                <a:ea typeface="微軟正黑體" panose="020B0604030504040204" pitchFamily="34" charset="-120"/>
+                <a:cs typeface="Arial" panose="020B0604020202020204" pitchFamily="34" charset="0"/>
+              </a:rPr>
+              <a:t>I published</a:t>
+            </a:r>
+            <a:br>
+              <a:rPr lang="en-US" altLang="zh-TW" sz="4800" b="1" dirty="0">
+                <a:latin typeface="Arial" panose="020B0604020202020204" pitchFamily="34" charset="0"/>
+                <a:ea typeface="微軟正黑體" panose="020B0604030504040204" pitchFamily="34" charset="-120"/>
+                <a:cs typeface="Arial" panose="020B0604020202020204" pitchFamily="34" charset="0"/>
+              </a:rPr>
+            </a:br>
+            <a:r>
+              <a:rPr lang="en-US" altLang="zh-TW" sz="4800" b="1" dirty="0">
+                <a:latin typeface="Arial" panose="020B0604020202020204" pitchFamily="34" charset="0"/>
+                <a:ea typeface="微軟正黑體" panose="020B0604030504040204" pitchFamily="34" charset="-120"/>
+                <a:cs typeface="Arial" panose="020B0604020202020204" pitchFamily="34" charset="0"/>
+              </a:rPr>
+              <a:t>in 2018…</a:t>
+            </a:r>
+            <a:endParaRPr lang="zh-TW" altLang="en-US" sz="4800" b="1" dirty="0">
+              <a:latin typeface="Arial" panose="020B0604020202020204" pitchFamily="34" charset="0"/>
+              <a:ea typeface="微軟正黑體" panose="020B0604030504040204" pitchFamily="34" charset="-120"/>
+              <a:cs typeface="Arial" panose="020B0604020202020204" pitchFamily="34" charset="0"/>
+            </a:endParaRPr>
+          </a:p>
+        </p:txBody>
+      </p:sp>
+    </p:spTree>
+    <p:extLst>
+      <p:ext uri="{BB962C8B-B14F-4D97-AF65-F5344CB8AC3E}">
+        <p14:creationId xmlns:p14="http://schemas.microsoft.com/office/powerpoint/2010/main" val="2276398131"/>
+      </p:ext>
+    </p:extLst>
+  </p:cSld>
+  <p:clrMapOvr>
+    <a:masterClrMapping/>
+  </p:clrMapOvr>
+</p:sld>
+</file>
+
 <file path=ppt/slides/slide2.xml><?xml version="1.0" encoding="utf-8"?>
 <p:sld xmlns:a="http://schemas.openxmlformats.org/drawingml/2006/main" xmlns:r="http://schemas.openxmlformats.org/officeDocument/2006/relationships" xmlns:p="http://schemas.openxmlformats.org/presentationml/2006/main">
   <p:cSld>
